--- a/deep_learning/1_ANN/1-what-is-deep-learning.pptx
+++ b/deep_learning/1_ANN/1-what-is-deep-learning.pptx
@@ -230,7 +230,7 @@
           <a:p>
             <a:fld id="{7BAEECA8-D063-486F-AE31-5020270C1449}" type="datetimeFigureOut">
               <a:rPr lang="en-US" smtClean="0"/>
-              <a:t>3/8/2026</a:t>
+              <a:t>4/4/2026</a:t>
             </a:fld>
             <a:endParaRPr lang="en-US"/>
           </a:p>
@@ -407,7 +407,7 @@
           <a:p>
             <a:fld id="{CB233BD1-3BA8-448D-9D08-7846095EA517}" type="datetimeFigureOut">
               <a:rPr lang="en-US" smtClean="0"/>
-              <a:t>3/8/2026</a:t>
+              <a:t>4/4/2026</a:t>
             </a:fld>
             <a:endParaRPr lang="en-US"/>
           </a:p>
@@ -821,7 +821,7 @@
           <a:p>
             <a:fld id="{6383FAE1-13DE-4511-8C1B-C8AFB720664C}" type="datetimeFigureOut">
               <a:rPr lang="en-US" smtClean="0"/>
-              <a:t>3/8/2026</a:t>
+              <a:t>4/4/2026</a:t>
             </a:fld>
             <a:endParaRPr lang="en-US"/>
           </a:p>
@@ -1019,7 +1019,7 @@
           <a:p>
             <a:fld id="{6383FAE1-13DE-4511-8C1B-C8AFB720664C}" type="datetimeFigureOut">
               <a:rPr lang="en-US" smtClean="0"/>
-              <a:t>3/8/2026</a:t>
+              <a:t>4/4/2026</a:t>
             </a:fld>
             <a:endParaRPr lang="en-US"/>
           </a:p>
@@ -1227,7 +1227,7 @@
           <a:p>
             <a:fld id="{6383FAE1-13DE-4511-8C1B-C8AFB720664C}" type="datetimeFigureOut">
               <a:rPr lang="en-US" smtClean="0"/>
-              <a:t>3/8/2026</a:t>
+              <a:t>4/4/2026</a:t>
             </a:fld>
             <a:endParaRPr lang="en-US"/>
           </a:p>
@@ -1425,7 +1425,7 @@
           <a:p>
             <a:fld id="{6383FAE1-13DE-4511-8C1B-C8AFB720664C}" type="datetimeFigureOut">
               <a:rPr lang="en-US" smtClean="0"/>
-              <a:t>3/8/2026</a:t>
+              <a:t>4/4/2026</a:t>
             </a:fld>
             <a:endParaRPr lang="en-US"/>
           </a:p>
@@ -1700,7 +1700,7 @@
           <a:p>
             <a:fld id="{6383FAE1-13DE-4511-8C1B-C8AFB720664C}" type="datetimeFigureOut">
               <a:rPr lang="en-US" smtClean="0"/>
-              <a:t>3/8/2026</a:t>
+              <a:t>4/4/2026</a:t>
             </a:fld>
             <a:endParaRPr lang="en-US"/>
           </a:p>
@@ -1965,7 +1965,7 @@
           <a:p>
             <a:fld id="{6383FAE1-13DE-4511-8C1B-C8AFB720664C}" type="datetimeFigureOut">
               <a:rPr lang="en-US" smtClean="0"/>
-              <a:t>3/8/2026</a:t>
+              <a:t>4/4/2026</a:t>
             </a:fld>
             <a:endParaRPr lang="en-US"/>
           </a:p>
@@ -2377,7 +2377,7 @@
           <a:p>
             <a:fld id="{6383FAE1-13DE-4511-8C1B-C8AFB720664C}" type="datetimeFigureOut">
               <a:rPr lang="en-US" smtClean="0"/>
-              <a:t>3/8/2026</a:t>
+              <a:t>4/4/2026</a:t>
             </a:fld>
             <a:endParaRPr lang="en-US"/>
           </a:p>
@@ -2518,7 +2518,7 @@
           <a:p>
             <a:fld id="{6383FAE1-13DE-4511-8C1B-C8AFB720664C}" type="datetimeFigureOut">
               <a:rPr lang="en-US" smtClean="0"/>
-              <a:t>3/8/2026</a:t>
+              <a:t>4/4/2026</a:t>
             </a:fld>
             <a:endParaRPr lang="en-US"/>
           </a:p>
@@ -2631,7 +2631,7 @@
           <a:p>
             <a:fld id="{6383FAE1-13DE-4511-8C1B-C8AFB720664C}" type="datetimeFigureOut">
               <a:rPr lang="en-US" smtClean="0"/>
-              <a:t>3/8/2026</a:t>
+              <a:t>4/4/2026</a:t>
             </a:fld>
             <a:endParaRPr lang="en-US"/>
           </a:p>
@@ -2942,7 +2942,7 @@
           <a:p>
             <a:fld id="{6383FAE1-13DE-4511-8C1B-C8AFB720664C}" type="datetimeFigureOut">
               <a:rPr lang="en-US" smtClean="0"/>
-              <a:t>3/8/2026</a:t>
+              <a:t>4/4/2026</a:t>
             </a:fld>
             <a:endParaRPr lang="en-US"/>
           </a:p>
@@ -3233,7 +3233,7 @@
           <a:p>
             <a:fld id="{6383FAE1-13DE-4511-8C1B-C8AFB720664C}" type="datetimeFigureOut">
               <a:rPr lang="en-US" smtClean="0"/>
-              <a:t>3/8/2026</a:t>
+              <a:t>4/4/2026</a:t>
             </a:fld>
             <a:endParaRPr lang="en-US"/>
           </a:p>
@@ -3477,7 +3477,7 @@
           <a:p>
             <a:fld id="{6383FAE1-13DE-4511-8C1B-C8AFB720664C}" type="datetimeFigureOut">
               <a:rPr lang="en-US" smtClean="0"/>
-              <a:t>3/8/2026</a:t>
+              <a:t>4/4/2026</a:t>
             </a:fld>
             <a:endParaRPr lang="en-US"/>
           </a:p>
@@ -9437,7 +9437,7 @@
         <p:spPr>
           <a:xfrm>
             <a:off x="146304" y="359956"/>
-            <a:ext cx="11960352" cy="1877437"/>
+            <a:ext cx="11960352" cy="3354765"/>
           </a:xfrm>
           <a:prstGeom prst="rect">
             <a:avLst/>
@@ -9548,8 +9548,105 @@
               <a:t> the network.</a:t>
             </a:r>
           </a:p>
+          <a:p>
+            <a:pPr>
+              <a:buNone/>
+            </a:pPr>
+            <a:endParaRPr lang="en-US" sz="2400" dirty="0">
+              <a:solidFill>
+                <a:schemeClr val="accent6">
+                  <a:lumMod val="60000"/>
+                  <a:lumOff val="40000"/>
+                </a:schemeClr>
+              </a:solidFill>
+            </a:endParaRPr>
+          </a:p>
+          <a:p>
+            <a:r>
+              <a:rPr lang="en-US" sz="2400" dirty="0">
+                <a:solidFill>
+                  <a:schemeClr val="accent6">
+                    <a:lumMod val="60000"/>
+                    <a:lumOff val="40000"/>
+                  </a:schemeClr>
+                </a:solidFill>
+                <a:ea typeface="+mn-lt"/>
+                <a:cs typeface="+mn-lt"/>
+              </a:rPr>
+              <a:t>DL models are generally considered "</a:t>
+            </a:r>
+            <a:r>
+              <a:rPr lang="en-US" sz="2400" b="1" dirty="0">
+                <a:solidFill>
+                  <a:schemeClr val="accent6">
+                    <a:lumMod val="60000"/>
+                    <a:lumOff val="40000"/>
+                  </a:schemeClr>
+                </a:solidFill>
+                <a:ea typeface="+mn-lt"/>
+                <a:cs typeface="+mn-lt"/>
+              </a:rPr>
+              <a:t>black boxes</a:t>
+            </a:r>
+            <a:r>
+              <a:rPr lang="en-US" sz="2400" dirty="0">
+                <a:solidFill>
+                  <a:schemeClr val="accent6">
+                    <a:lumMod val="60000"/>
+                    <a:lumOff val="40000"/>
+                  </a:schemeClr>
+                </a:solidFill>
+                <a:ea typeface="+mn-lt"/>
+                <a:cs typeface="+mn-lt"/>
+              </a:rPr>
+              <a:t>," because they are difficult interpret/explain how decisions are made.</a:t>
+            </a:r>
+          </a:p>
+          <a:p>
+            <a:pPr>
+              <a:buNone/>
+            </a:pPr>
+            <a:endParaRPr lang="en-US" sz="2400" dirty="0">
+              <a:solidFill>
+                <a:schemeClr val="accent6">
+                  <a:lumMod val="60000"/>
+                  <a:lumOff val="40000"/>
+                </a:schemeClr>
+              </a:solidFill>
+            </a:endParaRPr>
+          </a:p>
         </p:txBody>
       </p:sp>
+      <p:pic>
+        <p:nvPicPr>
+          <p:cNvPr id="2" name="Picture 1" descr="Guide to Interpretable Machine Learning | by Matthew Stewart, PhD | TDS  Archive | Medium">
+            <a:extLst>
+              <a:ext uri="{FF2B5EF4-FFF2-40B4-BE49-F238E27FC236}">
+                <a16:creationId xmlns:a16="http://schemas.microsoft.com/office/drawing/2014/main" id="{043591AC-4FA3-1938-39B0-3AE2AF24481D}"/>
+              </a:ext>
+            </a:extLst>
+          </p:cNvPr>
+          <p:cNvPicPr>
+            <a:picLocks noChangeAspect="1"/>
+          </p:cNvPicPr>
+          <p:nvPr/>
+        </p:nvPicPr>
+        <p:blipFill>
+          <a:blip r:embed="rId2"/>
+          <a:stretch>
+            <a:fillRect/>
+          </a:stretch>
+        </p:blipFill>
+        <p:spPr>
+          <a:xfrm>
+            <a:off x="4001954" y="3357391"/>
+            <a:ext cx="4026478" cy="3140653"/>
+          </a:xfrm>
+          <a:prstGeom prst="rect">
+            <a:avLst/>
+          </a:prstGeom>
+        </p:spPr>
+      </p:pic>
     </p:spTree>
     <p:extLst>
       <p:ext uri="{BB962C8B-B14F-4D97-AF65-F5344CB8AC3E}">
